--- a/宣道詩/(宣道詩102)主必保守我.pptx
+++ b/宣道詩/(宣道詩102)主必保守我.pptx
@@ -323,6 +323,11 @@
         </p:txBody>
       </p:sp>
     </p:spTree>
+    <p:extLst>
+      <p:ext uri="{BB962C8B-B14F-4D97-AF65-F5344CB8AC3E}">
+        <p14:creationId xmlns:p14="http://schemas.microsoft.com/office/powerpoint/2010/main" val="1"/>
+      </p:ext>
+    </p:extLst>
   </p:cSld>
   <p:clrMap bg1="lt1" tx1="dk1" bg2="lt2" tx2="dk2" accent1="accent1" accent2="accent2" accent3="accent3" accent4="accent4" accent5="accent5" accent6="accent6" hlink="hlink" folHlink="folHlink"/>
 </p:handoutMaster>
@@ -472,38 +477,37 @@
           <a:p>
             <a:pPr lvl="0"/>
             <a:r>
-              <a:rPr lang="zh-TW" altLang="en-US" smtClean="0"/>
+              <a:rPr lang="zh-TW" altLang="en-US"/>
               <a:t>按一下以編輯母片文字樣式</a:t>
             </a:r>
           </a:p>
           <a:p>
             <a:pPr lvl="1"/>
             <a:r>
-              <a:rPr lang="zh-TW" altLang="en-US" smtClean="0"/>
+              <a:rPr lang="zh-TW" altLang="en-US"/>
               <a:t>第二層</a:t>
             </a:r>
           </a:p>
           <a:p>
             <a:pPr lvl="2"/>
             <a:r>
-              <a:rPr lang="zh-TW" altLang="en-US" smtClean="0"/>
+              <a:rPr lang="zh-TW" altLang="en-US"/>
               <a:t>第三層</a:t>
             </a:r>
           </a:p>
           <a:p>
             <a:pPr lvl="3"/>
             <a:r>
-              <a:rPr lang="zh-TW" altLang="en-US" smtClean="0"/>
+              <a:rPr lang="zh-TW" altLang="en-US"/>
               <a:t>第四層</a:t>
             </a:r>
           </a:p>
           <a:p>
             <a:pPr lvl="4"/>
             <a:r>
-              <a:rPr lang="zh-TW" altLang="en-US" smtClean="0"/>
+              <a:rPr lang="zh-TW" altLang="en-US"/>
               <a:t>第五層</a:t>
             </a:r>
-            <a:endParaRPr lang="zh-TW" altLang="en-US"/>
           </a:p>
         </p:txBody>
       </p:sp>
@@ -710,7 +714,7 @@
           <a:lstStyle/>
           <a:p>
             <a:r>
-              <a:rPr lang="en-US" altLang="zh-TW" smtClean="0"/>
+              <a:rPr lang="en-US" altLang="zh-TW"/>
               <a:t>Click to edit Master title style</a:t>
             </a:r>
             <a:endParaRPr lang="zh-TW" altLang="en-US"/>
@@ -829,7 +833,7 @@
           </a:lstStyle>
           <a:p>
             <a:r>
-              <a:rPr lang="en-US" altLang="zh-TW" smtClean="0"/>
+              <a:rPr lang="en-US" altLang="zh-TW"/>
               <a:t>Click to edit Master subtitle style</a:t>
             </a:r>
             <a:endParaRPr lang="zh-TW" altLang="en-US"/>
@@ -955,7 +959,7 @@
           <a:lstStyle/>
           <a:p>
             <a:r>
-              <a:rPr lang="en-US" altLang="zh-TW" smtClean="0"/>
+              <a:rPr lang="en-US" altLang="zh-TW"/>
               <a:t>Click to edit Master title style</a:t>
             </a:r>
             <a:endParaRPr lang="zh-TW" altLang="en-US"/>
@@ -979,35 +983,35 @@
           <a:p>
             <a:pPr lvl="0"/>
             <a:r>
-              <a:rPr lang="en-US" altLang="zh-TW" smtClean="0"/>
+              <a:rPr lang="en-US" altLang="zh-TW"/>
               <a:t>Edit Master text styles</a:t>
             </a:r>
           </a:p>
           <a:p>
             <a:pPr lvl="1"/>
             <a:r>
-              <a:rPr lang="en-US" altLang="zh-TW" smtClean="0"/>
+              <a:rPr lang="en-US" altLang="zh-TW"/>
               <a:t>Second level</a:t>
             </a:r>
           </a:p>
           <a:p>
             <a:pPr lvl="2"/>
             <a:r>
-              <a:rPr lang="en-US" altLang="zh-TW" smtClean="0"/>
+              <a:rPr lang="en-US" altLang="zh-TW"/>
               <a:t>Third level</a:t>
             </a:r>
           </a:p>
           <a:p>
             <a:pPr lvl="3"/>
             <a:r>
-              <a:rPr lang="en-US" altLang="zh-TW" smtClean="0"/>
+              <a:rPr lang="en-US" altLang="zh-TW"/>
               <a:t>Fourth level</a:t>
             </a:r>
           </a:p>
           <a:p>
             <a:pPr lvl="4"/>
             <a:r>
-              <a:rPr lang="en-US" altLang="zh-TW" smtClean="0"/>
+              <a:rPr lang="en-US" altLang="zh-TW"/>
               <a:t>Fifth level</a:t>
             </a:r>
             <a:endParaRPr lang="zh-TW" altLang="en-US"/>
@@ -1138,7 +1142,7 @@
           <a:lstStyle/>
           <a:p>
             <a:r>
-              <a:rPr lang="en-US" altLang="zh-TW" smtClean="0"/>
+              <a:rPr lang="en-US" altLang="zh-TW"/>
               <a:t>Click to edit Master title style</a:t>
             </a:r>
             <a:endParaRPr lang="zh-TW" altLang="en-US"/>
@@ -1167,35 +1171,35 @@
           <a:p>
             <a:pPr lvl="0"/>
             <a:r>
-              <a:rPr lang="en-US" altLang="zh-TW" smtClean="0"/>
+              <a:rPr lang="en-US" altLang="zh-TW"/>
               <a:t>Edit Master text styles</a:t>
             </a:r>
           </a:p>
           <a:p>
             <a:pPr lvl="1"/>
             <a:r>
-              <a:rPr lang="en-US" altLang="zh-TW" smtClean="0"/>
+              <a:rPr lang="en-US" altLang="zh-TW"/>
               <a:t>Second level</a:t>
             </a:r>
           </a:p>
           <a:p>
             <a:pPr lvl="2"/>
             <a:r>
-              <a:rPr lang="en-US" altLang="zh-TW" smtClean="0"/>
+              <a:rPr lang="en-US" altLang="zh-TW"/>
               <a:t>Third level</a:t>
             </a:r>
           </a:p>
           <a:p>
             <a:pPr lvl="3"/>
             <a:r>
-              <a:rPr lang="en-US" altLang="zh-TW" smtClean="0"/>
+              <a:rPr lang="en-US" altLang="zh-TW"/>
               <a:t>Fourth level</a:t>
             </a:r>
           </a:p>
           <a:p>
             <a:pPr lvl="4"/>
             <a:r>
-              <a:rPr lang="en-US" altLang="zh-TW" smtClean="0"/>
+              <a:rPr lang="en-US" altLang="zh-TW"/>
               <a:t>Fifth level</a:t>
             </a:r>
             <a:endParaRPr lang="zh-TW" altLang="en-US"/>
@@ -1321,7 +1325,7 @@
           <a:lstStyle/>
           <a:p>
             <a:r>
-              <a:rPr lang="en-US" altLang="zh-TW" smtClean="0"/>
+              <a:rPr lang="en-US" altLang="zh-TW"/>
               <a:t>Click to edit Master title style</a:t>
             </a:r>
             <a:endParaRPr lang="zh-TW" altLang="en-US"/>
@@ -1345,35 +1349,35 @@
           <a:p>
             <a:pPr lvl="0"/>
             <a:r>
-              <a:rPr lang="en-US" altLang="zh-TW" smtClean="0"/>
+              <a:rPr lang="en-US" altLang="zh-TW"/>
               <a:t>Edit Master text styles</a:t>
             </a:r>
           </a:p>
           <a:p>
             <a:pPr lvl="1"/>
             <a:r>
-              <a:rPr lang="en-US" altLang="zh-TW" smtClean="0"/>
+              <a:rPr lang="en-US" altLang="zh-TW"/>
               <a:t>Second level</a:t>
             </a:r>
           </a:p>
           <a:p>
             <a:pPr lvl="2"/>
             <a:r>
-              <a:rPr lang="en-US" altLang="zh-TW" smtClean="0"/>
+              <a:rPr lang="en-US" altLang="zh-TW"/>
               <a:t>Third level</a:t>
             </a:r>
           </a:p>
           <a:p>
             <a:pPr lvl="3"/>
             <a:r>
-              <a:rPr lang="en-US" altLang="zh-TW" smtClean="0"/>
+              <a:rPr lang="en-US" altLang="zh-TW"/>
               <a:t>Fourth level</a:t>
             </a:r>
           </a:p>
           <a:p>
             <a:pPr lvl="4"/>
             <a:r>
-              <a:rPr lang="en-US" altLang="zh-TW" smtClean="0"/>
+              <a:rPr lang="en-US" altLang="zh-TW"/>
               <a:t>Fifth level</a:t>
             </a:r>
             <a:endParaRPr lang="zh-TW" altLang="en-US"/>
@@ -1508,7 +1512,7 @@
           </a:lstStyle>
           <a:p>
             <a:r>
-              <a:rPr lang="en-US" altLang="zh-TW" smtClean="0"/>
+              <a:rPr lang="en-US" altLang="zh-TW"/>
               <a:t>Click to edit Master title style</a:t>
             </a:r>
             <a:endParaRPr lang="zh-TW" altLang="en-US"/>
@@ -1628,7 +1632,7 @@
           <a:p>
             <a:pPr lvl="0"/>
             <a:r>
-              <a:rPr lang="en-US" altLang="zh-TW" smtClean="0"/>
+              <a:rPr lang="en-US" altLang="zh-TW"/>
               <a:t>Edit Master text styles</a:t>
             </a:r>
           </a:p>
@@ -1753,7 +1757,7 @@
           <a:lstStyle/>
           <a:p>
             <a:r>
-              <a:rPr lang="en-US" altLang="zh-TW" smtClean="0"/>
+              <a:rPr lang="en-US" altLang="zh-TW"/>
               <a:t>Click to edit Master title style</a:t>
             </a:r>
             <a:endParaRPr lang="zh-TW" altLang="en-US"/>
@@ -1810,35 +1814,35 @@
           <a:p>
             <a:pPr lvl="0"/>
             <a:r>
-              <a:rPr lang="en-US" altLang="zh-TW" smtClean="0"/>
+              <a:rPr lang="en-US" altLang="zh-TW"/>
               <a:t>Edit Master text styles</a:t>
             </a:r>
           </a:p>
           <a:p>
             <a:pPr lvl="1"/>
             <a:r>
-              <a:rPr lang="en-US" altLang="zh-TW" smtClean="0"/>
+              <a:rPr lang="en-US" altLang="zh-TW"/>
               <a:t>Second level</a:t>
             </a:r>
           </a:p>
           <a:p>
             <a:pPr lvl="2"/>
             <a:r>
-              <a:rPr lang="en-US" altLang="zh-TW" smtClean="0"/>
+              <a:rPr lang="en-US" altLang="zh-TW"/>
               <a:t>Third level</a:t>
             </a:r>
           </a:p>
           <a:p>
             <a:pPr lvl="3"/>
             <a:r>
-              <a:rPr lang="en-US" altLang="zh-TW" smtClean="0"/>
+              <a:rPr lang="en-US" altLang="zh-TW"/>
               <a:t>Fourth level</a:t>
             </a:r>
           </a:p>
           <a:p>
             <a:pPr lvl="4"/>
             <a:r>
-              <a:rPr lang="en-US" altLang="zh-TW" smtClean="0"/>
+              <a:rPr lang="en-US" altLang="zh-TW"/>
               <a:t>Fifth level</a:t>
             </a:r>
             <a:endParaRPr lang="zh-TW" altLang="en-US"/>
@@ -1895,35 +1899,35 @@
           <a:p>
             <a:pPr lvl="0"/>
             <a:r>
-              <a:rPr lang="en-US" altLang="zh-TW" smtClean="0"/>
+              <a:rPr lang="en-US" altLang="zh-TW"/>
               <a:t>Edit Master text styles</a:t>
             </a:r>
           </a:p>
           <a:p>
             <a:pPr lvl="1"/>
             <a:r>
-              <a:rPr lang="en-US" altLang="zh-TW" smtClean="0"/>
+              <a:rPr lang="en-US" altLang="zh-TW"/>
               <a:t>Second level</a:t>
             </a:r>
           </a:p>
           <a:p>
             <a:pPr lvl="2"/>
             <a:r>
-              <a:rPr lang="en-US" altLang="zh-TW" smtClean="0"/>
+              <a:rPr lang="en-US" altLang="zh-TW"/>
               <a:t>Third level</a:t>
             </a:r>
           </a:p>
           <a:p>
             <a:pPr lvl="3"/>
             <a:r>
-              <a:rPr lang="en-US" altLang="zh-TW" smtClean="0"/>
+              <a:rPr lang="en-US" altLang="zh-TW"/>
               <a:t>Fourth level</a:t>
             </a:r>
           </a:p>
           <a:p>
             <a:pPr lvl="4"/>
             <a:r>
-              <a:rPr lang="en-US" altLang="zh-TW" smtClean="0"/>
+              <a:rPr lang="en-US" altLang="zh-TW"/>
               <a:t>Fifth level</a:t>
             </a:r>
             <a:endParaRPr lang="zh-TW" altLang="en-US"/>
@@ -2053,7 +2057,7 @@
           </a:lstStyle>
           <a:p>
             <a:r>
-              <a:rPr lang="en-US" altLang="zh-TW" smtClean="0"/>
+              <a:rPr lang="en-US" altLang="zh-TW"/>
               <a:t>Click to edit Master title style</a:t>
             </a:r>
             <a:endParaRPr lang="zh-TW" altLang="en-US"/>
@@ -2119,7 +2123,7 @@
           <a:p>
             <a:pPr lvl="0"/>
             <a:r>
-              <a:rPr lang="en-US" altLang="zh-TW" smtClean="0"/>
+              <a:rPr lang="en-US" altLang="zh-TW"/>
               <a:t>Edit Master text styles</a:t>
             </a:r>
           </a:p>
@@ -2175,35 +2179,35 @@
           <a:p>
             <a:pPr lvl="0"/>
             <a:r>
-              <a:rPr lang="en-US" altLang="zh-TW" smtClean="0"/>
+              <a:rPr lang="en-US" altLang="zh-TW"/>
               <a:t>Edit Master text styles</a:t>
             </a:r>
           </a:p>
           <a:p>
             <a:pPr lvl="1"/>
             <a:r>
-              <a:rPr lang="en-US" altLang="zh-TW" smtClean="0"/>
+              <a:rPr lang="en-US" altLang="zh-TW"/>
               <a:t>Second level</a:t>
             </a:r>
           </a:p>
           <a:p>
             <a:pPr lvl="2"/>
             <a:r>
-              <a:rPr lang="en-US" altLang="zh-TW" smtClean="0"/>
+              <a:rPr lang="en-US" altLang="zh-TW"/>
               <a:t>Third level</a:t>
             </a:r>
           </a:p>
           <a:p>
             <a:pPr lvl="3"/>
             <a:r>
-              <a:rPr lang="en-US" altLang="zh-TW" smtClean="0"/>
+              <a:rPr lang="en-US" altLang="zh-TW"/>
               <a:t>Fourth level</a:t>
             </a:r>
           </a:p>
           <a:p>
             <a:pPr lvl="4"/>
             <a:r>
-              <a:rPr lang="en-US" altLang="zh-TW" smtClean="0"/>
+              <a:rPr lang="en-US" altLang="zh-TW"/>
               <a:t>Fifth level</a:t>
             </a:r>
             <a:endParaRPr lang="zh-TW" altLang="en-US"/>
@@ -2269,7 +2273,7 @@
           <a:p>
             <a:pPr lvl="0"/>
             <a:r>
-              <a:rPr lang="en-US" altLang="zh-TW" smtClean="0"/>
+              <a:rPr lang="en-US" altLang="zh-TW"/>
               <a:t>Edit Master text styles</a:t>
             </a:r>
           </a:p>
@@ -2325,35 +2329,35 @@
           <a:p>
             <a:pPr lvl="0"/>
             <a:r>
-              <a:rPr lang="en-US" altLang="zh-TW" smtClean="0"/>
+              <a:rPr lang="en-US" altLang="zh-TW"/>
               <a:t>Edit Master text styles</a:t>
             </a:r>
           </a:p>
           <a:p>
             <a:pPr lvl="1"/>
             <a:r>
-              <a:rPr lang="en-US" altLang="zh-TW" smtClean="0"/>
+              <a:rPr lang="en-US" altLang="zh-TW"/>
               <a:t>Second level</a:t>
             </a:r>
           </a:p>
           <a:p>
             <a:pPr lvl="2"/>
             <a:r>
-              <a:rPr lang="en-US" altLang="zh-TW" smtClean="0"/>
+              <a:rPr lang="en-US" altLang="zh-TW"/>
               <a:t>Third level</a:t>
             </a:r>
           </a:p>
           <a:p>
             <a:pPr lvl="3"/>
             <a:r>
-              <a:rPr lang="en-US" altLang="zh-TW" smtClean="0"/>
+              <a:rPr lang="en-US" altLang="zh-TW"/>
               <a:t>Fourth level</a:t>
             </a:r>
           </a:p>
           <a:p>
             <a:pPr lvl="4"/>
             <a:r>
-              <a:rPr lang="en-US" altLang="zh-TW" smtClean="0"/>
+              <a:rPr lang="en-US" altLang="zh-TW"/>
               <a:t>Fifth level</a:t>
             </a:r>
             <a:endParaRPr lang="zh-TW" altLang="en-US"/>
@@ -2479,7 +2483,7 @@
           <a:lstStyle/>
           <a:p>
             <a:r>
-              <a:rPr lang="en-US" altLang="zh-TW" smtClean="0"/>
+              <a:rPr lang="en-US" altLang="zh-TW"/>
               <a:t>Click to edit Master title style</a:t>
             </a:r>
             <a:endParaRPr lang="zh-TW" altLang="en-US"/>
@@ -2717,7 +2721,7 @@
           </a:lstStyle>
           <a:p>
             <a:r>
-              <a:rPr lang="en-US" altLang="zh-TW" smtClean="0"/>
+              <a:rPr lang="en-US" altLang="zh-TW"/>
               <a:t>Click to edit Master title style</a:t>
             </a:r>
             <a:endParaRPr lang="zh-TW" altLang="en-US"/>
@@ -2774,35 +2778,35 @@
           <a:p>
             <a:pPr lvl="0"/>
             <a:r>
-              <a:rPr lang="en-US" altLang="zh-TW" smtClean="0"/>
+              <a:rPr lang="en-US" altLang="zh-TW"/>
               <a:t>Edit Master text styles</a:t>
             </a:r>
           </a:p>
           <a:p>
             <a:pPr lvl="1"/>
             <a:r>
-              <a:rPr lang="en-US" altLang="zh-TW" smtClean="0"/>
+              <a:rPr lang="en-US" altLang="zh-TW"/>
               <a:t>Second level</a:t>
             </a:r>
           </a:p>
           <a:p>
             <a:pPr lvl="2"/>
             <a:r>
-              <a:rPr lang="en-US" altLang="zh-TW" smtClean="0"/>
+              <a:rPr lang="en-US" altLang="zh-TW"/>
               <a:t>Third level</a:t>
             </a:r>
           </a:p>
           <a:p>
             <a:pPr lvl="3"/>
             <a:r>
-              <a:rPr lang="en-US" altLang="zh-TW" smtClean="0"/>
+              <a:rPr lang="en-US" altLang="zh-TW"/>
               <a:t>Fourth level</a:t>
             </a:r>
           </a:p>
           <a:p>
             <a:pPr lvl="4"/>
             <a:r>
-              <a:rPr lang="en-US" altLang="zh-TW" smtClean="0"/>
+              <a:rPr lang="en-US" altLang="zh-TW"/>
               <a:t>Fifth level</a:t>
             </a:r>
             <a:endParaRPr lang="zh-TW" altLang="en-US"/>
@@ -2868,7 +2872,7 @@
           <a:p>
             <a:pPr lvl="0"/>
             <a:r>
-              <a:rPr lang="en-US" altLang="zh-TW" smtClean="0"/>
+              <a:rPr lang="en-US" altLang="zh-TW"/>
               <a:t>Edit Master text styles</a:t>
             </a:r>
           </a:p>
@@ -3002,7 +3006,7 @@
           </a:lstStyle>
           <a:p>
             <a:r>
-              <a:rPr lang="en-US" altLang="zh-TW" smtClean="0"/>
+              <a:rPr lang="en-US" altLang="zh-TW"/>
               <a:t>Click to edit Master title style</a:t>
             </a:r>
             <a:endParaRPr lang="zh-TW" altLang="en-US"/>
@@ -3067,7 +3071,7 @@
           </a:lstStyle>
           <a:p>
             <a:r>
-              <a:rPr lang="en-US" altLang="zh-TW" dirty="0" smtClean="0"/>
+              <a:rPr lang="en-US" altLang="zh-TW" dirty="0"/>
               <a:t>Click icon to add picture</a:t>
             </a:r>
             <a:endParaRPr lang="zh-TW" altLang="en-US"/>
@@ -3133,7 +3137,7 @@
           <a:p>
             <a:pPr lvl="0"/>
             <a:r>
-              <a:rPr lang="en-US" altLang="zh-TW" smtClean="0"/>
+              <a:rPr lang="en-US" altLang="zh-TW"/>
               <a:t>Edit Master text styles</a:t>
             </a:r>
           </a:p>
@@ -3278,10 +3282,9 @@
           <a:lstStyle/>
           <a:p>
             <a:r>
-              <a:rPr lang="zh-TW" altLang="en-US" smtClean="0"/>
+              <a:rPr lang="zh-TW" altLang="en-US"/>
               <a:t>按一下以編輯母片標題樣式</a:t>
             </a:r>
-            <a:endParaRPr lang="zh-TW" altLang="en-US"/>
           </a:p>
         </p:txBody>
       </p:sp>
@@ -3312,38 +3315,37 @@
           <a:p>
             <a:pPr lvl="0"/>
             <a:r>
-              <a:rPr lang="zh-TW" altLang="en-US" smtClean="0"/>
+              <a:rPr lang="zh-TW" altLang="en-US"/>
               <a:t>按一下以編輯母片文字樣式</a:t>
             </a:r>
           </a:p>
           <a:p>
             <a:pPr lvl="1"/>
             <a:r>
-              <a:rPr lang="zh-TW" altLang="en-US" smtClean="0"/>
+              <a:rPr lang="zh-TW" altLang="en-US"/>
               <a:t>第二層</a:t>
             </a:r>
           </a:p>
           <a:p>
             <a:pPr lvl="2"/>
             <a:r>
-              <a:rPr lang="zh-TW" altLang="en-US" smtClean="0"/>
+              <a:rPr lang="zh-TW" altLang="en-US"/>
               <a:t>第三層</a:t>
             </a:r>
           </a:p>
           <a:p>
             <a:pPr lvl="3"/>
             <a:r>
-              <a:rPr lang="zh-TW" altLang="en-US" smtClean="0"/>
+              <a:rPr lang="zh-TW" altLang="en-US"/>
               <a:t>第四層</a:t>
             </a:r>
           </a:p>
           <a:p>
             <a:pPr lvl="4"/>
             <a:r>
-              <a:rPr lang="zh-TW" altLang="en-US" smtClean="0"/>
+              <a:rPr lang="zh-TW" altLang="en-US"/>
               <a:t>第五層</a:t>
             </a:r>
-            <a:endParaRPr lang="zh-TW" altLang="en-US"/>
           </a:p>
         </p:txBody>
       </p:sp>
@@ -3821,23 +3823,6 @@
               </a:rPr>
               <a:t>102</a:t>
             </a:r>
-            <a:r>
-              <a:rPr lang="en-US" altLang="zh-CN" sz="7200" b="1" i="1" dirty="0">
-                <a:solidFill>
-                  <a:srgbClr val="660033"/>
-                </a:solidFill>
-                <a:effectLst>
-                  <a:outerShdw blurRad="38100" dist="38100" dir="2700000" algn="tl">
-                    <a:srgbClr val="000000">
-                      <a:alpha val="43137"/>
-                    </a:srgbClr>
-                  </a:outerShdw>
-                </a:effectLst>
-                <a:latin typeface="微軟正黑體" pitchFamily="34" charset="-120"/>
-                <a:ea typeface="微軟正黑體" pitchFamily="34" charset="-120"/>
-              </a:rPr>
-              <a:t/>
-            </a:r>
             <a:br>
               <a:rPr lang="en-US" altLang="zh-CN" sz="7200" b="1" i="1" dirty="0">
                 <a:solidFill>
@@ -3869,24 +3854,7 @@
                 <a:latin typeface="微軟正黑體" pitchFamily="34" charset="-120"/>
                 <a:ea typeface="微軟正黑體" pitchFamily="34" charset="-120"/>
               </a:rPr>
-              <a:t>主</a:t>
-            </a:r>
-            <a:r>
-              <a:rPr lang="zh-CN" altLang="en-US" sz="8000" b="1" dirty="0">
-                <a:solidFill>
-                  <a:srgbClr val="660033"/>
-                </a:solidFill>
-                <a:effectLst>
-                  <a:outerShdw blurRad="38100" dist="38100" dir="2700000" algn="tl">
-                    <a:srgbClr val="000000">
-                      <a:alpha val="43137"/>
-                    </a:srgbClr>
-                  </a:outerShdw>
-                </a:effectLst>
-                <a:latin typeface="微軟正黑體" pitchFamily="34" charset="-120"/>
-                <a:ea typeface="微軟正黑體" pitchFamily="34" charset="-120"/>
-              </a:rPr>
-              <a:t>必保守我</a:t>
+              <a:t>主必保守我</a:t>
             </a:r>
             <a:endParaRPr lang="zh-TW" altLang="en-US" sz="8000" b="1" dirty="0">
               <a:solidFill>
@@ -3915,13 +3883,6 @@
   <p:clrMapOvr>
     <a:masterClrMapping/>
   </p:clrMapOvr>
-  <p:timing>
-    <p:tnLst>
-      <p:par>
-        <p:cTn id="1" dur="indefinite" restart="never" nodeType="tmRoot"/>
-      </p:par>
-    </p:tnLst>
-  </p:timing>
 </p:sld>
 </file>
 
@@ -3992,13 +3953,6 @@
               </a:rPr>
               <a:t>因我救主這樣愛我  主要保守我</a:t>
             </a:r>
-            <a:endParaRPr lang="zh-TW" altLang="en-US" sz="6400" b="1" dirty="0">
-              <a:solidFill>
-                <a:srgbClr val="660033"/>
-              </a:solidFill>
-              <a:latin typeface="Microsoft JhengHei" panose="020B0604030504040204" pitchFamily="34" charset="-120"/>
-              <a:ea typeface="Microsoft JhengHei" panose="020B0604030504040204" pitchFamily="34" charset="-120"/>
-            </a:endParaRPr>
           </a:p>
         </p:txBody>
       </p:sp>
@@ -4012,13 +3966,6 @@
   <p:clrMapOvr>
     <a:masterClrMapping/>
   </p:clrMapOvr>
-  <p:timing>
-    <p:tnLst>
-      <p:par>
-        <p:cTn id="1" dur="indefinite" restart="never" nodeType="tmRoot"/>
-      </p:par>
-    </p:tnLst>
-  </p:timing>
 </p:sld>
 </file>
 
@@ -4089,13 +4036,6 @@
               </a:rPr>
               <a:t>主必保守我</a:t>
             </a:r>
-            <a:endParaRPr lang="zh-TW" altLang="en-US" sz="6400" b="1" dirty="0">
-              <a:solidFill>
-                <a:srgbClr val="660033"/>
-              </a:solidFill>
-              <a:latin typeface="Microsoft JhengHei" panose="020B0604030504040204" pitchFamily="34" charset="-120"/>
-              <a:ea typeface="Microsoft JhengHei" panose="020B0604030504040204" pitchFamily="34" charset="-120"/>
-            </a:endParaRPr>
           </a:p>
         </p:txBody>
       </p:sp>
@@ -4108,7 +4048,7 @@
         <p:spPr>
           <a:xfrm>
             <a:off x="0" y="5061183"/>
-            <a:ext cx="12192000" cy="830997"/>
+            <a:ext cx="12192000" cy="646331"/>
           </a:xfrm>
           <a:prstGeom prst="rect">
             <a:avLst/>
@@ -4123,33 +4063,46 @@
           <a:p>
             <a:pPr algn="ctr"/>
             <a:r>
-              <a:rPr lang="en-US" sz="4800" b="1" dirty="0">
+              <a:rPr lang="en-US" sz="3600" b="1" dirty="0">
                 <a:solidFill>
                   <a:srgbClr val="660033"/>
                 </a:solidFill>
+                <a:latin typeface="+mn-lt"/>
               </a:rPr>
-              <a:t>( </a:t>
-            </a:r>
-            <a:r>
-              <a:rPr lang="en-US" sz="4800" b="1" dirty="0">
+              <a:t>( 4 /</a:t>
+            </a:r>
+            <a:r>
+              <a:rPr lang="zh-CN" altLang="en-US" sz="3600" b="1" dirty="0">
                 <a:solidFill>
                   <a:srgbClr val="660033"/>
                 </a:solidFill>
+                <a:latin typeface="+mn-lt"/>
               </a:rPr>
-              <a:t>4 </a:t>
-            </a:r>
-            <a:r>
-              <a:rPr lang="en-US" sz="4800" b="1" dirty="0">
+              <a:t> </a:t>
+            </a:r>
+            <a:r>
+              <a:rPr lang="en-US" altLang="zh-CN" sz="3600" b="1" dirty="0">
                 <a:solidFill>
                   <a:srgbClr val="660033"/>
                 </a:solidFill>
+                <a:latin typeface="+mn-lt"/>
               </a:rPr>
-              <a:t>)</a:t>
-            </a:r>
-            <a:endParaRPr lang="vi-VN" sz="4800" b="1" dirty="0">
+              <a:t>4</a:t>
+            </a:r>
+            <a:r>
+              <a:rPr lang="en-US" sz="3600" b="1" dirty="0">
+                <a:solidFill>
+                  <a:srgbClr val="660033"/>
+                </a:solidFill>
+                <a:latin typeface="+mn-lt"/>
+              </a:rPr>
+              <a:t> )</a:t>
+            </a:r>
+            <a:endParaRPr lang="vi-VN" sz="3600" b="1" dirty="0">
               <a:solidFill>
                 <a:srgbClr val="660033"/>
               </a:solidFill>
+              <a:latin typeface="+mn-lt"/>
             </a:endParaRPr>
           </a:p>
         </p:txBody>
@@ -4164,13 +4117,6 @@
   <p:clrMapOvr>
     <a:masterClrMapping/>
   </p:clrMapOvr>
-  <p:timing>
-    <p:tnLst>
-      <p:par>
-        <p:cTn id="1" dur="indefinite" restart="never" nodeType="tmRoot"/>
-      </p:par>
-    </p:tnLst>
-  </p:timing>
 </p:sld>
 </file>
 
@@ -4241,13 +4187,6 @@
               </a:rPr>
               <a:t>主必保守我</a:t>
             </a:r>
-            <a:endParaRPr lang="zh-TW" altLang="en-US" sz="6400" b="1" dirty="0">
-              <a:solidFill>
-                <a:srgbClr val="660033"/>
-              </a:solidFill>
-              <a:latin typeface="Microsoft JhengHei" panose="020B0604030504040204" pitchFamily="34" charset="-120"/>
-              <a:ea typeface="Microsoft JhengHei" panose="020B0604030504040204" pitchFamily="34" charset="-120"/>
-            </a:endParaRPr>
           </a:p>
         </p:txBody>
       </p:sp>
@@ -4260,7 +4199,7 @@
         <p:spPr>
           <a:xfrm>
             <a:off x="0" y="5061183"/>
-            <a:ext cx="12192000" cy="830997"/>
+            <a:ext cx="12192000" cy="646331"/>
           </a:xfrm>
           <a:prstGeom prst="rect">
             <a:avLst/>
@@ -4275,33 +4214,46 @@
           <a:p>
             <a:pPr algn="ctr"/>
             <a:r>
-              <a:rPr lang="en-US" sz="4800" b="1" dirty="0">
+              <a:rPr lang="en-US" sz="3600" b="1" dirty="0">
                 <a:solidFill>
                   <a:srgbClr val="660033"/>
                 </a:solidFill>
+                <a:latin typeface="+mn-lt"/>
               </a:rPr>
-              <a:t>( </a:t>
-            </a:r>
-            <a:r>
-              <a:rPr lang="en-US" sz="4800" b="1" dirty="0">
+              <a:t>( 4 /</a:t>
+            </a:r>
+            <a:r>
+              <a:rPr lang="zh-CN" altLang="en-US" sz="3600" b="1" dirty="0">
                 <a:solidFill>
                   <a:srgbClr val="660033"/>
                 </a:solidFill>
+                <a:latin typeface="+mn-lt"/>
               </a:rPr>
-              <a:t>4 </a:t>
-            </a:r>
-            <a:r>
-              <a:rPr lang="en-US" sz="4800" b="1" dirty="0">
+              <a:t> </a:t>
+            </a:r>
+            <a:r>
+              <a:rPr lang="en-US" altLang="zh-CN" sz="3600" b="1" dirty="0">
                 <a:solidFill>
                   <a:srgbClr val="660033"/>
                 </a:solidFill>
+                <a:latin typeface="+mn-lt"/>
               </a:rPr>
-              <a:t>)</a:t>
-            </a:r>
-            <a:endParaRPr lang="vi-VN" sz="4800" b="1" dirty="0">
+              <a:t>4</a:t>
+            </a:r>
+            <a:r>
+              <a:rPr lang="en-US" sz="3600" b="1" dirty="0">
+                <a:solidFill>
+                  <a:srgbClr val="660033"/>
+                </a:solidFill>
+                <a:latin typeface="+mn-lt"/>
+              </a:rPr>
+              <a:t> )</a:t>
+            </a:r>
+            <a:endParaRPr lang="vi-VN" sz="3600" b="1" dirty="0">
               <a:solidFill>
                 <a:srgbClr val="660033"/>
               </a:solidFill>
+              <a:latin typeface="+mn-lt"/>
             </a:endParaRPr>
           </a:p>
         </p:txBody>
@@ -4316,13 +4268,6 @@
   <p:clrMapOvr>
     <a:masterClrMapping/>
   </p:clrMapOvr>
-  <p:timing>
-    <p:tnLst>
-      <p:par>
-        <p:cTn id="1" dur="indefinite" restart="never" nodeType="tmRoot"/>
-      </p:par>
-    </p:tnLst>
-  </p:timing>
 </p:sld>
 </file>
 
@@ -4393,13 +4338,6 @@
               </a:rPr>
               <a:t>因我救主這樣愛我  主要保守我</a:t>
             </a:r>
-            <a:endParaRPr lang="zh-TW" altLang="en-US" sz="6400" b="1" dirty="0">
-              <a:solidFill>
-                <a:srgbClr val="660033"/>
-              </a:solidFill>
-              <a:latin typeface="Microsoft JhengHei" panose="020B0604030504040204" pitchFamily="34" charset="-120"/>
-              <a:ea typeface="Microsoft JhengHei" panose="020B0604030504040204" pitchFamily="34" charset="-120"/>
-            </a:endParaRPr>
           </a:p>
         </p:txBody>
       </p:sp>
@@ -4413,13 +4351,6 @@
   <p:clrMapOvr>
     <a:masterClrMapping/>
   </p:clrMapOvr>
-  <p:timing>
-    <p:tnLst>
-      <p:par>
-        <p:cTn id="1" dur="indefinite" restart="never" nodeType="tmRoot"/>
-      </p:par>
-    </p:tnLst>
-  </p:timing>
 </p:sld>
 </file>
 
@@ -4473,17 +4404,7 @@
                 <a:latin typeface="Microsoft JhengHei" pitchFamily="34" charset="-120"/>
                 <a:ea typeface="Microsoft JhengHei" pitchFamily="34" charset="-120"/>
               </a:rPr>
-              <a:t>有</a:t>
-            </a:r>
-            <a:r>
-              <a:rPr lang="zh-TW" altLang="en-US" sz="6400" b="1" dirty="0">
-                <a:solidFill>
-                  <a:srgbClr val="660033"/>
-                </a:solidFill>
-                <a:latin typeface="Microsoft JhengHei" pitchFamily="34" charset="-120"/>
-                <a:ea typeface="Microsoft JhengHei" pitchFamily="34" charset="-120"/>
-              </a:rPr>
-              <a:t>時我怕信心失喪</a:t>
+              <a:t>有時我怕信心失喪</a:t>
             </a:r>
           </a:p>
           <a:p>
@@ -4512,7 +4433,7 @@
         <p:spPr>
           <a:xfrm>
             <a:off x="0" y="5061183"/>
-            <a:ext cx="12192000" cy="830997"/>
+            <a:ext cx="12192000" cy="646331"/>
           </a:xfrm>
           <a:prstGeom prst="rect">
             <a:avLst/>
@@ -4527,17 +4448,46 @@
           <a:p>
             <a:pPr algn="ctr"/>
             <a:r>
-              <a:rPr lang="en-US" sz="4800" b="1" dirty="0">
+              <a:rPr lang="en-US" sz="3600" b="1" dirty="0">
                 <a:solidFill>
                   <a:srgbClr val="660033"/>
                 </a:solidFill>
+                <a:latin typeface="+mn-lt"/>
               </a:rPr>
-              <a:t>( 1 )</a:t>
-            </a:r>
-            <a:endParaRPr lang="vi-VN" sz="4800" b="1" dirty="0">
+              <a:t>( 1 /</a:t>
+            </a:r>
+            <a:r>
+              <a:rPr lang="zh-CN" altLang="en-US" sz="3600" b="1" dirty="0">
+                <a:solidFill>
+                  <a:srgbClr val="660033"/>
+                </a:solidFill>
+                <a:latin typeface="+mn-lt"/>
+              </a:rPr>
+              <a:t> </a:t>
+            </a:r>
+            <a:r>
+              <a:rPr lang="en-US" altLang="zh-CN" sz="3600" b="1" dirty="0">
+                <a:solidFill>
+                  <a:srgbClr val="660033"/>
+                </a:solidFill>
+                <a:latin typeface="+mn-lt"/>
+              </a:rPr>
+              <a:t>4</a:t>
+            </a:r>
+            <a:r>
+              <a:rPr lang="en-US" sz="3600" b="1" dirty="0">
+                <a:solidFill>
+                  <a:srgbClr val="660033"/>
+                </a:solidFill>
+                <a:latin typeface="+mn-lt"/>
+              </a:rPr>
+              <a:t> )</a:t>
+            </a:r>
+            <a:endParaRPr lang="vi-VN" sz="3600" b="1" dirty="0">
               <a:solidFill>
                 <a:srgbClr val="660033"/>
               </a:solidFill>
+              <a:latin typeface="+mn-lt"/>
             </a:endParaRPr>
           </a:p>
         </p:txBody>
@@ -4552,13 +4502,6 @@
   <p:clrMapOvr>
     <a:masterClrMapping/>
   </p:clrMapOvr>
-  <p:timing>
-    <p:tnLst>
-      <p:par>
-        <p:cTn id="1" dur="indefinite" restart="never" nodeType="tmRoot"/>
-      </p:par>
-    </p:tnLst>
-  </p:timing>
 </p:sld>
 </file>
 
@@ -4629,13 +4572,6 @@
               </a:rPr>
               <a:t>主能保守我</a:t>
             </a:r>
-            <a:endParaRPr lang="zh-TW" altLang="en-US" sz="6400" b="1" dirty="0">
-              <a:solidFill>
-                <a:srgbClr val="660033"/>
-              </a:solidFill>
-              <a:latin typeface="Microsoft JhengHei" panose="020B0604030504040204" pitchFamily="34" charset="-120"/>
-              <a:ea typeface="Microsoft JhengHei" panose="020B0604030504040204" pitchFamily="34" charset="-120"/>
-            </a:endParaRPr>
           </a:p>
         </p:txBody>
       </p:sp>
@@ -4648,7 +4584,7 @@
         <p:spPr>
           <a:xfrm>
             <a:off x="0" y="5061183"/>
-            <a:ext cx="12192000" cy="830997"/>
+            <a:ext cx="12192000" cy="646331"/>
           </a:xfrm>
           <a:prstGeom prst="rect">
             <a:avLst/>
@@ -4663,17 +4599,46 @@
           <a:p>
             <a:pPr algn="ctr"/>
             <a:r>
-              <a:rPr lang="en-US" sz="4800" b="1" dirty="0">
+              <a:rPr lang="en-US" sz="3600" b="1" dirty="0">
                 <a:solidFill>
                   <a:srgbClr val="660033"/>
                 </a:solidFill>
+                <a:latin typeface="+mn-lt"/>
               </a:rPr>
-              <a:t>( 1 )</a:t>
-            </a:r>
-            <a:endParaRPr lang="vi-VN" sz="4800" b="1" dirty="0">
+              <a:t>( 1 /</a:t>
+            </a:r>
+            <a:r>
+              <a:rPr lang="zh-CN" altLang="en-US" sz="3600" b="1" dirty="0">
+                <a:solidFill>
+                  <a:srgbClr val="660033"/>
+                </a:solidFill>
+                <a:latin typeface="+mn-lt"/>
+              </a:rPr>
+              <a:t> </a:t>
+            </a:r>
+            <a:r>
+              <a:rPr lang="en-US" altLang="zh-CN" sz="3600" b="1" dirty="0">
+                <a:solidFill>
+                  <a:srgbClr val="660033"/>
+                </a:solidFill>
+                <a:latin typeface="+mn-lt"/>
+              </a:rPr>
+              <a:t>4</a:t>
+            </a:r>
+            <a:r>
+              <a:rPr lang="en-US" sz="3600" b="1" dirty="0">
+                <a:solidFill>
+                  <a:srgbClr val="660033"/>
+                </a:solidFill>
+                <a:latin typeface="+mn-lt"/>
+              </a:rPr>
+              <a:t> )</a:t>
+            </a:r>
+            <a:endParaRPr lang="vi-VN" sz="3600" b="1" dirty="0">
               <a:solidFill>
                 <a:srgbClr val="660033"/>
               </a:solidFill>
+              <a:latin typeface="+mn-lt"/>
             </a:endParaRPr>
           </a:p>
         </p:txBody>
@@ -4688,13 +4653,6 @@
   <p:clrMapOvr>
     <a:masterClrMapping/>
   </p:clrMapOvr>
-  <p:timing>
-    <p:tnLst>
-      <p:par>
-        <p:cTn id="1" dur="indefinite" restart="never" nodeType="tmRoot"/>
-      </p:par>
-    </p:tnLst>
-  </p:timing>
 </p:sld>
 </file>
 
@@ -4765,13 +4723,6 @@
               </a:rPr>
               <a:t>因我救主這樣愛我  主要保守我</a:t>
             </a:r>
-            <a:endParaRPr lang="zh-TW" altLang="en-US" sz="6400" b="1" dirty="0">
-              <a:solidFill>
-                <a:srgbClr val="660033"/>
-              </a:solidFill>
-              <a:latin typeface="Microsoft JhengHei" panose="020B0604030504040204" pitchFamily="34" charset="-120"/>
-              <a:ea typeface="Microsoft JhengHei" panose="020B0604030504040204" pitchFamily="34" charset="-120"/>
-            </a:endParaRPr>
           </a:p>
         </p:txBody>
       </p:sp>
@@ -4785,13 +4736,6 @@
   <p:clrMapOvr>
     <a:masterClrMapping/>
   </p:clrMapOvr>
-  <p:timing>
-    <p:tnLst>
-      <p:par>
-        <p:cTn id="1" dur="indefinite" restart="never" nodeType="tmRoot"/>
-      </p:par>
-    </p:tnLst>
-  </p:timing>
 </p:sld>
 </file>
 
@@ -4862,13 +4806,6 @@
               </a:rPr>
               <a:t>主必保守我</a:t>
             </a:r>
-            <a:endParaRPr lang="zh-TW" altLang="en-US" sz="6400" b="1" dirty="0">
-              <a:solidFill>
-                <a:srgbClr val="660033"/>
-              </a:solidFill>
-              <a:latin typeface="Microsoft JhengHei" panose="020B0604030504040204" pitchFamily="34" charset="-120"/>
-              <a:ea typeface="Microsoft JhengHei" panose="020B0604030504040204" pitchFamily="34" charset="-120"/>
-            </a:endParaRPr>
           </a:p>
         </p:txBody>
       </p:sp>
@@ -4881,7 +4818,7 @@
         <p:spPr>
           <a:xfrm>
             <a:off x="0" y="5061183"/>
-            <a:ext cx="12192000" cy="830997"/>
+            <a:ext cx="12192000" cy="646331"/>
           </a:xfrm>
           <a:prstGeom prst="rect">
             <a:avLst/>
@@ -4896,33 +4833,46 @@
           <a:p>
             <a:pPr algn="ctr"/>
             <a:r>
-              <a:rPr lang="en-US" sz="4800" b="1" dirty="0">
+              <a:rPr lang="en-US" sz="3600" b="1" dirty="0">
                 <a:solidFill>
                   <a:srgbClr val="660033"/>
                 </a:solidFill>
+                <a:latin typeface="+mn-lt"/>
               </a:rPr>
-              <a:t>( </a:t>
-            </a:r>
-            <a:r>
-              <a:rPr lang="en-US" sz="4800" b="1" dirty="0">
+              <a:t>( 2 /</a:t>
+            </a:r>
+            <a:r>
+              <a:rPr lang="zh-CN" altLang="en-US" sz="3600" b="1" dirty="0">
                 <a:solidFill>
                   <a:srgbClr val="660033"/>
                 </a:solidFill>
+                <a:latin typeface="+mn-lt"/>
               </a:rPr>
-              <a:t>2 </a:t>
-            </a:r>
-            <a:r>
-              <a:rPr lang="en-US" sz="4800" b="1" dirty="0">
+              <a:t> </a:t>
+            </a:r>
+            <a:r>
+              <a:rPr lang="en-US" altLang="zh-CN" sz="3600" b="1" dirty="0">
                 <a:solidFill>
                   <a:srgbClr val="660033"/>
                 </a:solidFill>
+                <a:latin typeface="+mn-lt"/>
               </a:rPr>
-              <a:t>)</a:t>
-            </a:r>
-            <a:endParaRPr lang="vi-VN" sz="4800" b="1" dirty="0">
+              <a:t>4</a:t>
+            </a:r>
+            <a:r>
+              <a:rPr lang="en-US" sz="3600" b="1" dirty="0">
+                <a:solidFill>
+                  <a:srgbClr val="660033"/>
+                </a:solidFill>
+                <a:latin typeface="+mn-lt"/>
+              </a:rPr>
+              <a:t> )</a:t>
+            </a:r>
+            <a:endParaRPr lang="vi-VN" sz="3600" b="1" dirty="0">
               <a:solidFill>
                 <a:srgbClr val="660033"/>
               </a:solidFill>
+              <a:latin typeface="+mn-lt"/>
             </a:endParaRPr>
           </a:p>
         </p:txBody>
@@ -4937,13 +4887,6 @@
   <p:clrMapOvr>
     <a:masterClrMapping/>
   </p:clrMapOvr>
-  <p:timing>
-    <p:tnLst>
-      <p:par>
-        <p:cTn id="1" dur="indefinite" restart="never" nodeType="tmRoot"/>
-      </p:par>
-    </p:tnLst>
-  </p:timing>
 </p:sld>
 </file>
 
@@ -5014,13 +4957,6 @@
               </a:rPr>
               <a:t>主必保守我</a:t>
             </a:r>
-            <a:endParaRPr lang="zh-TW" altLang="en-US" sz="6400" b="1" dirty="0">
-              <a:solidFill>
-                <a:srgbClr val="660033"/>
-              </a:solidFill>
-              <a:latin typeface="Microsoft JhengHei" panose="020B0604030504040204" pitchFamily="34" charset="-120"/>
-              <a:ea typeface="Microsoft JhengHei" panose="020B0604030504040204" pitchFamily="34" charset="-120"/>
-            </a:endParaRPr>
           </a:p>
         </p:txBody>
       </p:sp>
@@ -5033,7 +4969,7 @@
         <p:spPr>
           <a:xfrm>
             <a:off x="0" y="5061183"/>
-            <a:ext cx="12192000" cy="830997"/>
+            <a:ext cx="12192000" cy="646331"/>
           </a:xfrm>
           <a:prstGeom prst="rect">
             <a:avLst/>
@@ -5048,33 +4984,46 @@
           <a:p>
             <a:pPr algn="ctr"/>
             <a:r>
-              <a:rPr lang="en-US" sz="4800" b="1" dirty="0">
+              <a:rPr lang="en-US" sz="3600" b="1" dirty="0">
                 <a:solidFill>
                   <a:srgbClr val="660033"/>
                 </a:solidFill>
+                <a:latin typeface="+mn-lt"/>
               </a:rPr>
-              <a:t>( </a:t>
-            </a:r>
-            <a:r>
-              <a:rPr lang="en-US" sz="4800" b="1" dirty="0">
+              <a:t>( 2 /</a:t>
+            </a:r>
+            <a:r>
+              <a:rPr lang="zh-CN" altLang="en-US" sz="3600" b="1" dirty="0">
                 <a:solidFill>
                   <a:srgbClr val="660033"/>
                 </a:solidFill>
+                <a:latin typeface="+mn-lt"/>
               </a:rPr>
-              <a:t>2 </a:t>
-            </a:r>
-            <a:r>
-              <a:rPr lang="en-US" sz="4800" b="1" dirty="0">
+              <a:t> </a:t>
+            </a:r>
+            <a:r>
+              <a:rPr lang="en-US" altLang="zh-CN" sz="3600" b="1" dirty="0">
                 <a:solidFill>
                   <a:srgbClr val="660033"/>
                 </a:solidFill>
+                <a:latin typeface="+mn-lt"/>
               </a:rPr>
-              <a:t>)</a:t>
-            </a:r>
-            <a:endParaRPr lang="vi-VN" sz="4800" b="1" dirty="0">
+              <a:t>4</a:t>
+            </a:r>
+            <a:r>
+              <a:rPr lang="en-US" sz="3600" b="1" dirty="0">
+                <a:solidFill>
+                  <a:srgbClr val="660033"/>
+                </a:solidFill>
+                <a:latin typeface="+mn-lt"/>
+              </a:rPr>
+              <a:t> )</a:t>
+            </a:r>
+            <a:endParaRPr lang="vi-VN" sz="3600" b="1" dirty="0">
               <a:solidFill>
                 <a:srgbClr val="660033"/>
               </a:solidFill>
+              <a:latin typeface="+mn-lt"/>
             </a:endParaRPr>
           </a:p>
         </p:txBody>
@@ -5089,13 +5038,6 @@
   <p:clrMapOvr>
     <a:masterClrMapping/>
   </p:clrMapOvr>
-  <p:timing>
-    <p:tnLst>
-      <p:par>
-        <p:cTn id="1" dur="indefinite" restart="never" nodeType="tmRoot"/>
-      </p:par>
-    </p:tnLst>
-  </p:timing>
 </p:sld>
 </file>
 
@@ -5166,13 +5108,6 @@
               </a:rPr>
               <a:t>因我救主這樣愛我  主要保守我</a:t>
             </a:r>
-            <a:endParaRPr lang="zh-TW" altLang="en-US" sz="6400" b="1" dirty="0">
-              <a:solidFill>
-                <a:srgbClr val="660033"/>
-              </a:solidFill>
-              <a:latin typeface="Microsoft JhengHei" panose="020B0604030504040204" pitchFamily="34" charset="-120"/>
-              <a:ea typeface="Microsoft JhengHei" panose="020B0604030504040204" pitchFamily="34" charset="-120"/>
-            </a:endParaRPr>
           </a:p>
         </p:txBody>
       </p:sp>
@@ -5186,13 +5121,6 @@
   <p:clrMapOvr>
     <a:masterClrMapping/>
   </p:clrMapOvr>
-  <p:timing>
-    <p:tnLst>
-      <p:par>
-        <p:cTn id="1" dur="indefinite" restart="never" nodeType="tmRoot"/>
-      </p:par>
-    </p:tnLst>
-  </p:timing>
 </p:sld>
 </file>
 
@@ -5263,13 +5191,6 @@
               </a:rPr>
               <a:t>主要保守我</a:t>
             </a:r>
-            <a:endParaRPr lang="zh-TW" altLang="en-US" sz="6400" b="1" dirty="0">
-              <a:solidFill>
-                <a:srgbClr val="660033"/>
-              </a:solidFill>
-              <a:latin typeface="Microsoft JhengHei" panose="020B0604030504040204" pitchFamily="34" charset="-120"/>
-              <a:ea typeface="Microsoft JhengHei" panose="020B0604030504040204" pitchFamily="34" charset="-120"/>
-            </a:endParaRPr>
           </a:p>
         </p:txBody>
       </p:sp>
@@ -5282,7 +5203,7 @@
         <p:spPr>
           <a:xfrm>
             <a:off x="0" y="5061183"/>
-            <a:ext cx="12192000" cy="830997"/>
+            <a:ext cx="12192000" cy="646331"/>
           </a:xfrm>
           <a:prstGeom prst="rect">
             <a:avLst/>
@@ -5297,33 +5218,46 @@
           <a:p>
             <a:pPr algn="ctr"/>
             <a:r>
-              <a:rPr lang="en-US" sz="4800" b="1" dirty="0">
+              <a:rPr lang="en-US" sz="3600" b="1" dirty="0">
                 <a:solidFill>
                   <a:srgbClr val="660033"/>
                 </a:solidFill>
+                <a:latin typeface="+mn-lt"/>
               </a:rPr>
-              <a:t>( </a:t>
-            </a:r>
-            <a:r>
-              <a:rPr lang="en-US" sz="4800" b="1" dirty="0">
+              <a:t>( 3 /</a:t>
+            </a:r>
+            <a:r>
+              <a:rPr lang="zh-CN" altLang="en-US" sz="3600" b="1" dirty="0">
                 <a:solidFill>
                   <a:srgbClr val="660033"/>
                 </a:solidFill>
+                <a:latin typeface="+mn-lt"/>
               </a:rPr>
-              <a:t>3 </a:t>
-            </a:r>
-            <a:r>
-              <a:rPr lang="en-US" sz="4800" b="1" dirty="0">
+              <a:t> </a:t>
+            </a:r>
+            <a:r>
+              <a:rPr lang="en-US" altLang="zh-CN" sz="3600" b="1" dirty="0">
                 <a:solidFill>
                   <a:srgbClr val="660033"/>
                 </a:solidFill>
+                <a:latin typeface="+mn-lt"/>
               </a:rPr>
-              <a:t>)</a:t>
-            </a:r>
-            <a:endParaRPr lang="vi-VN" sz="4800" b="1" dirty="0">
+              <a:t>4</a:t>
+            </a:r>
+            <a:r>
+              <a:rPr lang="en-US" sz="3600" b="1" dirty="0">
+                <a:solidFill>
+                  <a:srgbClr val="660033"/>
+                </a:solidFill>
+                <a:latin typeface="+mn-lt"/>
+              </a:rPr>
+              <a:t> )</a:t>
+            </a:r>
+            <a:endParaRPr lang="vi-VN" sz="3600" b="1" dirty="0">
               <a:solidFill>
                 <a:srgbClr val="660033"/>
               </a:solidFill>
+              <a:latin typeface="+mn-lt"/>
             </a:endParaRPr>
           </a:p>
         </p:txBody>
@@ -5338,13 +5272,6 @@
   <p:clrMapOvr>
     <a:masterClrMapping/>
   </p:clrMapOvr>
-  <p:timing>
-    <p:tnLst>
-      <p:par>
-        <p:cTn id="1" dur="indefinite" restart="never" nodeType="tmRoot"/>
-      </p:par>
-    </p:tnLst>
-  </p:timing>
 </p:sld>
 </file>
 
@@ -5415,13 +5342,6 @@
               </a:rPr>
               <a:t>主要保守我</a:t>
             </a:r>
-            <a:endParaRPr lang="zh-TW" altLang="en-US" sz="6400" b="1" dirty="0">
-              <a:solidFill>
-                <a:srgbClr val="660033"/>
-              </a:solidFill>
-              <a:latin typeface="Microsoft JhengHei" panose="020B0604030504040204" pitchFamily="34" charset="-120"/>
-              <a:ea typeface="Microsoft JhengHei" panose="020B0604030504040204" pitchFamily="34" charset="-120"/>
-            </a:endParaRPr>
           </a:p>
         </p:txBody>
       </p:sp>
@@ -5434,7 +5354,7 @@
         <p:spPr>
           <a:xfrm>
             <a:off x="0" y="5061183"/>
-            <a:ext cx="12192000" cy="830997"/>
+            <a:ext cx="12192000" cy="646331"/>
           </a:xfrm>
           <a:prstGeom prst="rect">
             <a:avLst/>
@@ -5449,33 +5369,46 @@
           <a:p>
             <a:pPr algn="ctr"/>
             <a:r>
-              <a:rPr lang="en-US" sz="4800" b="1" dirty="0">
+              <a:rPr lang="en-US" sz="3600" b="1" dirty="0">
                 <a:solidFill>
                   <a:srgbClr val="660033"/>
                 </a:solidFill>
+                <a:latin typeface="+mn-lt"/>
               </a:rPr>
-              <a:t>( </a:t>
-            </a:r>
-            <a:r>
-              <a:rPr lang="en-US" sz="4800" b="1" dirty="0">
+              <a:t>( 3 /</a:t>
+            </a:r>
+            <a:r>
+              <a:rPr lang="zh-CN" altLang="en-US" sz="3600" b="1" dirty="0">
                 <a:solidFill>
                   <a:srgbClr val="660033"/>
                 </a:solidFill>
+                <a:latin typeface="+mn-lt"/>
               </a:rPr>
-              <a:t>3 </a:t>
-            </a:r>
-            <a:r>
-              <a:rPr lang="en-US" sz="4800" b="1" dirty="0">
+              <a:t> </a:t>
+            </a:r>
+            <a:r>
+              <a:rPr lang="en-US" altLang="zh-CN" sz="3600" b="1" dirty="0">
                 <a:solidFill>
                   <a:srgbClr val="660033"/>
                 </a:solidFill>
+                <a:latin typeface="+mn-lt"/>
               </a:rPr>
-              <a:t>)</a:t>
-            </a:r>
-            <a:endParaRPr lang="vi-VN" sz="4800" b="1" dirty="0">
+              <a:t>4</a:t>
+            </a:r>
+            <a:r>
+              <a:rPr lang="en-US" sz="3600" b="1" dirty="0">
+                <a:solidFill>
+                  <a:srgbClr val="660033"/>
+                </a:solidFill>
+                <a:latin typeface="+mn-lt"/>
+              </a:rPr>
+              <a:t> )</a:t>
+            </a:r>
+            <a:endParaRPr lang="vi-VN" sz="3600" b="1" dirty="0">
               <a:solidFill>
                 <a:srgbClr val="660033"/>
               </a:solidFill>
+              <a:latin typeface="+mn-lt"/>
             </a:endParaRPr>
           </a:p>
         </p:txBody>
@@ -5490,13 +5423,6 @@
   <p:clrMapOvr>
     <a:masterClrMapping/>
   </p:clrMapOvr>
-  <p:timing>
-    <p:tnLst>
-      <p:par>
-        <p:cTn id="1" dur="indefinite" restart="never" nodeType="tmRoot"/>
-      </p:par>
-    </p:tnLst>
-  </p:timing>
 </p:sld>
 </file>
 
